--- a/Secure-Cloud-Document-Management-on-AWS (1).pptx
+++ b/Secure-Cloud-Document-Management-on-AWS (1).pptx
@@ -1570,13 +1570,13 @@
   <p:clrMapOvr>
     <a:masterClrMapping/>
   </p:clrMapOvr>
-  <mc:AlternateContent xmlns:mc="http://schemas.openxmlformats.org/markup-compatibility/2006">
-    <mc:Choice xmlns:p159="http://schemas.microsoft.com/office/powerpoint/2015/09/main" Requires="p159">
+  <mc:AlternateContent xmlns:mc="http://schemas.openxmlformats.org/markup-compatibility/2006" xmlns:p159="http://schemas.microsoft.com/office/powerpoint/2015/09/main">
+    <mc:Choice Requires="p159">
       <p:transition xmlns:p14="http://schemas.microsoft.com/office/powerpoint/2010/main" spd="slow" p14:dur="2000">
         <p159:morph option="byObject"/>
       </p:transition>
     </mc:Choice>
-    <mc:Fallback>
+    <mc:Fallback xmlns="">
       <p:transition spd="slow">
         <p:fade/>
       </p:transition>
@@ -1683,13 +1683,13 @@
   <p:clrMapOvr>
     <a:masterClrMapping/>
   </p:clrMapOvr>
-  <mc:AlternateContent xmlns:mc="http://schemas.openxmlformats.org/markup-compatibility/2006">
-    <mc:Choice xmlns:p159="http://schemas.microsoft.com/office/powerpoint/2015/09/main" Requires="p159">
+  <mc:AlternateContent xmlns:mc="http://schemas.openxmlformats.org/markup-compatibility/2006" xmlns:p159="http://schemas.microsoft.com/office/powerpoint/2015/09/main">
+    <mc:Choice Requires="p159">
       <p:transition xmlns:p14="http://schemas.microsoft.com/office/powerpoint/2010/main" spd="slow" p14:dur="2000">
         <p159:morph option="byObject"/>
       </p:transition>
     </mc:Choice>
-    <mc:Fallback>
+    <mc:Fallback xmlns="">
       <p:transition spd="slow">
         <p:fade/>
       </p:transition>
@@ -1727,13 +1727,13 @@
     <p:sldLayoutId id="2147483649" r:id="rId1"/>
     <p:sldLayoutId id="2147483650" r:id="rId2"/>
   </p:sldLayoutIdLst>
-  <mc:AlternateContent xmlns:mc="http://schemas.openxmlformats.org/markup-compatibility/2006">
-    <mc:Choice xmlns:p159="http://schemas.microsoft.com/office/powerpoint/2015/09/main" Requires="p159">
+  <mc:AlternateContent xmlns:mc="http://schemas.openxmlformats.org/markup-compatibility/2006" xmlns:p159="http://schemas.microsoft.com/office/powerpoint/2015/09/main">
+    <mc:Choice Requires="p159">
       <p:transition xmlns:p14="http://schemas.microsoft.com/office/powerpoint/2010/main" spd="slow" p14:dur="2000">
         <p159:morph option="byObject"/>
       </p:transition>
     </mc:Choice>
-    <mc:Fallback>
+    <mc:Fallback xmlns="">
       <p:transition spd="slow">
         <p:fade/>
       </p:transition>
@@ -2169,13 +2169,13 @@
   <p:clrMapOvr>
     <a:masterClrMapping/>
   </p:clrMapOvr>
-  <mc:AlternateContent xmlns:mc="http://schemas.openxmlformats.org/markup-compatibility/2006">
-    <mc:Choice xmlns:p159="http://schemas.microsoft.com/office/powerpoint/2015/09/main" Requires="p159">
+  <mc:AlternateContent xmlns:mc="http://schemas.openxmlformats.org/markup-compatibility/2006" xmlns:p159="http://schemas.microsoft.com/office/powerpoint/2015/09/main">
+    <mc:Choice Requires="p159">
       <p:transition xmlns:p14="http://schemas.microsoft.com/office/powerpoint/2010/main" spd="slow" p14:dur="2000">
         <p159:morph option="byObject"/>
       </p:transition>
     </mc:Choice>
-    <mc:Fallback>
+    <mc:Fallback xmlns="">
       <p:transition spd="slow">
         <p:fade/>
       </p:transition>
@@ -2651,13 +2651,13 @@
   <p:clrMapOvr>
     <a:masterClrMapping/>
   </p:clrMapOvr>
-  <mc:AlternateContent xmlns:mc="http://schemas.openxmlformats.org/markup-compatibility/2006">
-    <mc:Choice xmlns:p159="http://schemas.microsoft.com/office/powerpoint/2015/09/main" Requires="p159">
+  <mc:AlternateContent xmlns:mc="http://schemas.openxmlformats.org/markup-compatibility/2006" xmlns:p159="http://schemas.microsoft.com/office/powerpoint/2015/09/main">
+    <mc:Choice Requires="p159">
       <p:transition xmlns:p14="http://schemas.microsoft.com/office/powerpoint/2010/main" spd="slow" p14:dur="2000">
         <p159:morph option="byObject"/>
       </p:transition>
     </mc:Choice>
-    <mc:Fallback>
+    <mc:Fallback xmlns="">
       <p:transition spd="slow">
         <p:fade/>
       </p:transition>
@@ -3263,13 +3263,13 @@
   <p:clrMapOvr>
     <a:masterClrMapping/>
   </p:clrMapOvr>
-  <mc:AlternateContent xmlns:mc="http://schemas.openxmlformats.org/markup-compatibility/2006">
-    <mc:Choice xmlns:p159="http://schemas.microsoft.com/office/powerpoint/2015/09/main" Requires="p159">
+  <mc:AlternateContent xmlns:mc="http://schemas.openxmlformats.org/markup-compatibility/2006" xmlns:p159="http://schemas.microsoft.com/office/powerpoint/2015/09/main">
+    <mc:Choice Requires="p159">
       <p:transition xmlns:p14="http://schemas.microsoft.com/office/powerpoint/2010/main" spd="slow" p14:dur="2000">
         <p159:morph option="byObject"/>
       </p:transition>
     </mc:Choice>
-    <mc:Fallback>
+    <mc:Fallback xmlns="">
       <p:transition spd="slow">
         <p:fade/>
       </p:transition>
@@ -4020,13 +4020,13 @@
   <p:clrMapOvr>
     <a:masterClrMapping/>
   </p:clrMapOvr>
-  <mc:AlternateContent xmlns:mc="http://schemas.openxmlformats.org/markup-compatibility/2006">
-    <mc:Choice xmlns:p159="http://schemas.microsoft.com/office/powerpoint/2015/09/main" Requires="p159">
+  <mc:AlternateContent xmlns:mc="http://schemas.openxmlformats.org/markup-compatibility/2006" xmlns:p159="http://schemas.microsoft.com/office/powerpoint/2015/09/main">
+    <mc:Choice Requires="p159">
       <p:transition xmlns:p14="http://schemas.microsoft.com/office/powerpoint/2010/main" spd="slow" p14:dur="2000">
         <p159:morph option="byObject"/>
       </p:transition>
     </mc:Choice>
-    <mc:Fallback>
+    <mc:Fallback xmlns="">
       <p:transition spd="slow">
         <p:fade/>
       </p:transition>
@@ -4836,13 +4836,13 @@
   <p:clrMapOvr>
     <a:masterClrMapping/>
   </p:clrMapOvr>
-  <mc:AlternateContent xmlns:mc="http://schemas.openxmlformats.org/markup-compatibility/2006">
-    <mc:Choice xmlns:p159="http://schemas.microsoft.com/office/powerpoint/2015/09/main" Requires="p159">
+  <mc:AlternateContent xmlns:mc="http://schemas.openxmlformats.org/markup-compatibility/2006" xmlns:p159="http://schemas.microsoft.com/office/powerpoint/2015/09/main">
+    <mc:Choice Requires="p159">
       <p:transition xmlns:p14="http://schemas.microsoft.com/office/powerpoint/2010/main" spd="slow" p14:dur="2000">
         <p159:morph option="byObject"/>
       </p:transition>
     </mc:Choice>
-    <mc:Fallback>
+    <mc:Fallback xmlns="">
       <p:transition spd="slow">
         <p:fade/>
       </p:transition>
@@ -4944,8 +4944,8 @@
         </p:nvSpPr>
         <p:spPr>
           <a:xfrm>
-            <a:off x="661475" y="5631061"/>
-            <a:ext cx="10868745" cy="604838"/>
+            <a:off x="661475" y="5631060"/>
+            <a:ext cx="10868745" cy="1142963"/>
           </a:xfrm>
           <a:prstGeom prst="rect">
             <a:avLst/>
@@ -4955,7 +4955,7 @@
         </p:spPr>
         <p:txBody>
           <a:bodyPr wrap="square" lIns="0" tIns="0" rIns="0" bIns="0" rtlCol="0" anchor="t">
-            <a:normAutofit/>
+            <a:normAutofit lnSpcReduction="10000"/>
           </a:bodyPr>
           <a:lstStyle/>
           <a:p>
@@ -4975,6 +4975,39 @@
                 <a:cs typeface="Heebo Light" pitchFamily="34" charset="-120"/>
               </a:rPr>
               <a:t>CloudVault Eclipse delivers on the promise of modern, secure, and accessible document management. Let's discuss how this solution can transform your data strategy.</a:t>
+            </a:r>
+          </a:p>
+          <a:p>
+            <a:pPr marL="0" indent="0" algn="ctr">
+              <a:lnSpc>
+                <a:spcPct val="133000"/>
+              </a:lnSpc>
+              <a:buNone/>
+            </a:pPr>
+            <a:endParaRPr lang="en-US" sz="1450" dirty="0">
+              <a:solidFill>
+                <a:srgbClr val="DCD7E5"/>
+              </a:solidFill>
+              <a:latin typeface="Heebo Light" pitchFamily="34" charset="0"/>
+              <a:cs typeface="Heebo Light" pitchFamily="34" charset="-120"/>
+            </a:endParaRPr>
+          </a:p>
+          <a:p>
+            <a:pPr marL="0" indent="0" algn="ctr">
+              <a:lnSpc>
+                <a:spcPct val="133000"/>
+              </a:lnSpc>
+              <a:buNone/>
+            </a:pPr>
+            <a:r>
+              <a:rPr lang="en-US" sz="1450" dirty="0">
+                <a:solidFill>
+                  <a:srgbClr val="DCD7E5"/>
+                </a:solidFill>
+                <a:latin typeface="Heebo Light" pitchFamily="34" charset="0"/>
+                <a:cs typeface="Heebo Light" pitchFamily="34" charset="-120"/>
+              </a:rPr>
+              <a:t>Thank you  :   By -  Divya H Kishore </a:t>
             </a:r>
             <a:endParaRPr lang="en-US" sz="1450" dirty="0"/>
           </a:p>
@@ -5039,13 +5072,13 @@
   <p:clrMapOvr>
     <a:masterClrMapping/>
   </p:clrMapOvr>
-  <mc:AlternateContent xmlns:mc="http://schemas.openxmlformats.org/markup-compatibility/2006">
-    <mc:Choice xmlns:p159="http://schemas.microsoft.com/office/powerpoint/2015/09/main" Requires="p159">
+  <mc:AlternateContent xmlns:mc="http://schemas.openxmlformats.org/markup-compatibility/2006" xmlns:p159="http://schemas.microsoft.com/office/powerpoint/2015/09/main">
+    <mc:Choice Requires="p159">
       <p:transition xmlns:p14="http://schemas.microsoft.com/office/powerpoint/2010/main" spd="slow" p14:dur="2000">
         <p159:morph option="byObject"/>
       </p:transition>
     </mc:Choice>
-    <mc:Fallback>
+    <mc:Fallback xmlns="">
       <p:transition spd="slow">
         <p:fade/>
       </p:transition>
@@ -5589,15 +5622,11 @@
     <a:masterClrMapping/>
   </p:clrMapOvr>
   <mc:AlternateContent xmlns:mc="http://schemas.openxmlformats.org/markup-compatibility/2006">
-    <mc:Choice xmlns:p159="http://schemas.microsoft.com/office/powerpoint/2015/09/main" Requires="p159">
-      <p:transition xmlns:p14="http://schemas.microsoft.com/office/powerpoint/2010/main" spd="slow" p14:dur="2000">
-        <p159:morph option="byObject"/>
-      </p:transition>
+    <mc:Choice xmlns:p14="http://schemas.microsoft.com/office/powerpoint/2010/main" Requires="p14">
+      <p:transition p14:dur="0"/>
     </mc:Choice>
     <mc:Fallback>
-      <p:transition spd="slow">
-        <p:fade/>
-      </p:transition>
+      <p:transition/>
     </mc:Fallback>
   </mc:AlternateContent>
 </p:sld>
@@ -5857,15 +5886,11 @@
     <a:masterClrMapping/>
   </p:clrMapOvr>
   <mc:AlternateContent xmlns:mc="http://schemas.openxmlformats.org/markup-compatibility/2006">
-    <mc:Choice xmlns:p159="http://schemas.microsoft.com/office/powerpoint/2015/09/main" Requires="p159">
-      <p:transition xmlns:p14="http://schemas.microsoft.com/office/powerpoint/2010/main" spd="slow" p14:dur="2000">
-        <p159:morph option="byObject"/>
-      </p:transition>
+    <mc:Choice xmlns:p14="http://schemas.microsoft.com/office/powerpoint/2010/main" Requires="p14">
+      <p:transition p14:dur="0"/>
     </mc:Choice>
     <mc:Fallback>
-      <p:transition spd="slow">
-        <p:fade/>
-      </p:transition>
+      <p:transition/>
     </mc:Fallback>
   </mc:AlternateContent>
 </p:sld>
@@ -6907,13 +6932,13 @@
   <p:clrMapOvr>
     <a:masterClrMapping/>
   </p:clrMapOvr>
-  <mc:AlternateContent xmlns:mc="http://schemas.openxmlformats.org/markup-compatibility/2006">
-    <mc:Choice xmlns:p159="http://schemas.microsoft.com/office/powerpoint/2015/09/main" Requires="p159">
+  <mc:AlternateContent xmlns:mc="http://schemas.openxmlformats.org/markup-compatibility/2006" xmlns:p159="http://schemas.microsoft.com/office/powerpoint/2015/09/main">
+    <mc:Choice Requires="p159">
       <p:transition xmlns:p14="http://schemas.microsoft.com/office/powerpoint/2010/main" spd="slow" p14:dur="2000">
         <p159:morph option="byObject"/>
       </p:transition>
     </mc:Choice>
-    <mc:Fallback>
+    <mc:Fallback xmlns="">
       <p:transition spd="slow">
         <p:fade/>
       </p:transition>
@@ -8260,13 +8285,13 @@
   <p:clrMapOvr>
     <a:masterClrMapping/>
   </p:clrMapOvr>
-  <mc:AlternateContent xmlns:mc="http://schemas.openxmlformats.org/markup-compatibility/2006">
-    <mc:Choice xmlns:p159="http://schemas.microsoft.com/office/powerpoint/2015/09/main" Requires="p159">
+  <mc:AlternateContent xmlns:mc="http://schemas.openxmlformats.org/markup-compatibility/2006" xmlns:p159="http://schemas.microsoft.com/office/powerpoint/2015/09/main">
+    <mc:Choice Requires="p159">
       <p:transition xmlns:p14="http://schemas.microsoft.com/office/powerpoint/2010/main" spd="slow" p14:dur="2000">
         <p159:morph option="byObject"/>
       </p:transition>
     </mc:Choice>
-    <mc:Fallback>
+    <mc:Fallback xmlns="">
       <p:transition spd="slow">
         <p:fade/>
       </p:transition>
@@ -8782,13 +8807,13 @@
   <p:clrMapOvr>
     <a:masterClrMapping/>
   </p:clrMapOvr>
-  <mc:AlternateContent xmlns:mc="http://schemas.openxmlformats.org/markup-compatibility/2006">
-    <mc:Choice xmlns:p159="http://schemas.microsoft.com/office/powerpoint/2015/09/main" Requires="p159">
+  <mc:AlternateContent xmlns:mc="http://schemas.openxmlformats.org/markup-compatibility/2006" xmlns:p159="http://schemas.microsoft.com/office/powerpoint/2015/09/main">
+    <mc:Choice Requires="p159">
       <p:transition xmlns:p14="http://schemas.microsoft.com/office/powerpoint/2010/main" spd="slow" p14:dur="2000">
         <p159:morph option="byObject"/>
       </p:transition>
     </mc:Choice>
-    <mc:Fallback>
+    <mc:Fallback xmlns="">
       <p:transition spd="slow">
         <p:fade/>
       </p:transition>
@@ -8897,13 +8922,13 @@
   <p:clrMapOvr>
     <a:masterClrMapping/>
   </p:clrMapOvr>
-  <mc:AlternateContent xmlns:mc="http://schemas.openxmlformats.org/markup-compatibility/2006">
-    <mc:Choice xmlns:p159="http://schemas.microsoft.com/office/powerpoint/2015/09/main" Requires="p159">
+  <mc:AlternateContent xmlns:mc="http://schemas.openxmlformats.org/markup-compatibility/2006" xmlns:p159="http://schemas.microsoft.com/office/powerpoint/2015/09/main">
+    <mc:Choice Requires="p159">
       <p:transition xmlns:p14="http://schemas.microsoft.com/office/powerpoint/2010/main" spd="slow" p14:dur="2000">
         <p159:morph option="byObject"/>
       </p:transition>
     </mc:Choice>
-    <mc:Fallback>
+    <mc:Fallback xmlns="">
       <p:transition spd="slow">
         <p:fade/>
       </p:transition>
@@ -9502,13 +9527,13 @@
   <p:clrMapOvr>
     <a:masterClrMapping/>
   </p:clrMapOvr>
-  <mc:AlternateContent xmlns:mc="http://schemas.openxmlformats.org/markup-compatibility/2006">
-    <mc:Choice xmlns:p159="http://schemas.microsoft.com/office/powerpoint/2015/09/main" Requires="p159">
+  <mc:AlternateContent xmlns:mc="http://schemas.openxmlformats.org/markup-compatibility/2006" xmlns:p159="http://schemas.microsoft.com/office/powerpoint/2015/09/main">
+    <mc:Choice Requires="p159">
       <p:transition xmlns:p14="http://schemas.microsoft.com/office/powerpoint/2010/main" spd="slow" p14:dur="2000">
         <p159:morph option="byObject"/>
       </p:transition>
     </mc:Choice>
-    <mc:Fallback>
+    <mc:Fallback xmlns="">
       <p:transition spd="slow">
         <p:fade/>
       </p:transition>
@@ -10200,13 +10225,13 @@
   <p:clrMapOvr>
     <a:masterClrMapping/>
   </p:clrMapOvr>
-  <mc:AlternateContent xmlns:mc="http://schemas.openxmlformats.org/markup-compatibility/2006">
-    <mc:Choice xmlns:p159="http://schemas.microsoft.com/office/powerpoint/2015/09/main" Requires="p159">
+  <mc:AlternateContent xmlns:mc="http://schemas.openxmlformats.org/markup-compatibility/2006" xmlns:p159="http://schemas.microsoft.com/office/powerpoint/2015/09/main">
+    <mc:Choice Requires="p159">
       <p:transition xmlns:p14="http://schemas.microsoft.com/office/powerpoint/2010/main" spd="slow" p14:dur="2000">
         <p159:morph option="byObject"/>
       </p:transition>
     </mc:Choice>
-    <mc:Fallback>
+    <mc:Fallback xmlns="">
       <p:transition spd="slow">
         <p:fade/>
       </p:transition>
